--- a/builder/assets/reference-pages/box-plot.pptx
+++ b/builder/assets/reference-pages/box-plot.pptx
@@ -1099,7 +1099,7 @@
                   <a:srgbClr val="15375F"/>
                 </a:solidFill>
               </a:rPr>
-              <a:t>华东的典型交付周期最短且波动最小；西南的中位数和上尾均最高</a:t>
+              <a:t>East China has the shortest typical lead times and the least fluctuations; Southwest has the highest medians and upper tails</a:t>
             </a:r>
           </a:p>
         </p:txBody>
@@ -1151,7 +1151,7 @@
                   <a:srgbClr val="697386"/>
                 </a:solidFill>
               </a:rPr>
-              <a:t>合成示例数据，非真实客户数据</a:t>
+              <a:t>Synthetic sample data, not real customer data</a:t>
             </a:r>
           </a:p>
         </p:txBody>
@@ -1651,7 +1651,7 @@
                   <a:srgbClr val="15375F"/>
                 </a:solidFill>
               </a:rPr>
-              <a:t>单位：自然日</a:t>
+              <a:t>Unit: natural day</a:t>
             </a:r>
           </a:p>
         </p:txBody>
@@ -1703,7 +1703,7 @@
                   <a:srgbClr val="697386"/>
                 </a:solidFill>
               </a:rPr>
-              <a:t>分母：五个区域已完成且有有效起止时间的订单</a:t>
+              <a:t>Denominator: Completed orders in five areas with valid start and end times</a:t>
             </a:r>
           </a:p>
         </p:txBody>
@@ -2008,7 +2008,7 @@
                   <a:srgbClr val="E8872D"/>
                 </a:solidFill>
               </a:rPr>
-              <a:t>异常值 13.8</a:t>
+              <a:t>Outliers 13.8</a:t>
             </a:r>
           </a:p>
         </p:txBody>
@@ -2060,7 +2060,7 @@
                   <a:srgbClr val="15375F"/>
                 </a:solidFill>
               </a:rPr>
-              <a:t>华东</a:t>
+              <a:t>East China</a:t>
             </a:r>
           </a:p>
         </p:txBody>
@@ -2112,7 +2112,7 @@
                   <a:srgbClr val="697386"/>
                 </a:solidFill>
               </a:rPr>
-              <a:t>有效 n=64　缺失=2</a:t>
+              <a:t>valid n=64　Missing=2</a:t>
             </a:r>
           </a:p>
         </p:txBody>
@@ -2417,7 +2417,7 @@
                   <a:srgbClr val="E8872D"/>
                 </a:solidFill>
               </a:rPr>
-              <a:t>异常值 15.6</a:t>
+              <a:t>Outliers 15.6</a:t>
             </a:r>
           </a:p>
         </p:txBody>
@@ -2469,7 +2469,7 @@
                   <a:srgbClr val="15375F"/>
                 </a:solidFill>
               </a:rPr>
-              <a:t>华南</a:t>
+              <a:t>South China</a:t>
             </a:r>
           </a:p>
         </p:txBody>
@@ -2521,7 +2521,7 @@
                   <a:srgbClr val="697386"/>
                 </a:solidFill>
               </a:rPr>
-              <a:t>有效 n=58　缺失=1</a:t>
+              <a:t>valid n=58　Missing=1</a:t>
             </a:r>
           </a:p>
         </p:txBody>
@@ -2826,7 +2826,7 @@
                   <a:srgbClr val="E8872D"/>
                 </a:solidFill>
               </a:rPr>
-              <a:t>异常值 16.9</a:t>
+              <a:t>Outliers 16.9</a:t>
             </a:r>
           </a:p>
         </p:txBody>
@@ -2878,7 +2878,7 @@
                   <a:srgbClr val="15375F"/>
                 </a:solidFill>
               </a:rPr>
-              <a:t>华北</a:t>
+              <a:t>North China</a:t>
             </a:r>
           </a:p>
         </p:txBody>
@@ -2930,7 +2930,7 @@
                   <a:srgbClr val="697386"/>
                 </a:solidFill>
               </a:rPr>
-              <a:t>有效 n=61　缺失=3</a:t>
+              <a:t>valid n=61　Missing=3</a:t>
             </a:r>
           </a:p>
         </p:txBody>
@@ -3235,7 +3235,7 @@
                   <a:srgbClr val="E8872D"/>
                 </a:solidFill>
               </a:rPr>
-              <a:t>异常值 21.4</a:t>
+              <a:t>Outliers 21.4</a:t>
             </a:r>
           </a:p>
         </p:txBody>
@@ -3331,7 +3331,7 @@
                   <a:srgbClr val="E8872D"/>
                 </a:solidFill>
               </a:rPr>
-              <a:t>异常值 23</a:t>
+              <a:t>Outliers 23</a:t>
             </a:r>
           </a:p>
         </p:txBody>
@@ -3383,7 +3383,7 @@
                   <a:srgbClr val="15375F"/>
                 </a:solidFill>
               </a:rPr>
-              <a:t>西南</a:t>
+              <a:t>Southwest</a:t>
             </a:r>
           </a:p>
         </p:txBody>
@@ -3435,7 +3435,7 @@
                   <a:srgbClr val="697386"/>
                 </a:solidFill>
               </a:rPr>
-              <a:t>有效 n=55　缺失=4</a:t>
+              <a:t>valid n=55　Missing=4</a:t>
             </a:r>
           </a:p>
         </p:txBody>
@@ -3696,7 +3696,7 @@
                   <a:srgbClr val="15375F"/>
                 </a:solidFill>
               </a:rPr>
-              <a:t>华中</a:t>
+              <a:t>Central China</a:t>
             </a:r>
           </a:p>
         </p:txBody>
@@ -3748,7 +3748,7 @@
                   <a:srgbClr val="697386"/>
                 </a:solidFill>
               </a:rPr>
-              <a:t>有效 n=60　缺失=2</a:t>
+              <a:t>valid n=60　Missing=2</a:t>
             </a:r>
           </a:p>
         </p:txBody>
@@ -3833,7 +3833,7 @@
                   <a:srgbClr val="15375F"/>
                 </a:solidFill>
               </a:rPr>
-              <a:t>统计口径</a:t>
+              <a:t>Statistical caliber</a:t>
             </a:r>
           </a:p>
         </p:txBody>
@@ -3885,7 +3885,7 @@
                   <a:srgbClr val="E8872D"/>
                 </a:solidFill>
               </a:rPr>
-              <a:t>样本</a:t>
+              <a:t>sample</a:t>
             </a:r>
           </a:p>
         </p:txBody>
@@ -3937,7 +3937,7 @@
                   <a:srgbClr val="172033"/>
                 </a:solidFill>
               </a:rPr>
-              <a:t>2026年第二季度</a:t>
+              <a:t>2026second quarter</a:t>
             </a:r>
           </a:p>
           <a:p xmlns:a="http://schemas.openxmlformats.org/drawingml/2006/main">
@@ -3954,7 +3954,7 @@
                   <a:srgbClr val="172033"/>
                 </a:solidFill>
               </a:rPr>
-              <a:t>每条观察为一笔订单的签收日期减下单日期</a:t>
+              <a:t>Each observation is the receipt date of an order minus the order date.</a:t>
             </a:r>
           </a:p>
           <a:p xmlns:a="http://schemas.openxmlformats.org/drawingml/2006/main">
@@ -3971,7 +3971,7 @@
                   <a:srgbClr val="172033"/>
                 </a:solidFill>
               </a:rPr>
-              <a:t>缺失起止时间的订单不参与分位数计算，缺失数单独列示</a:t>
+              <a:t>Orders with missing start and end times are not included in the quantile calculation, and the missing numbers are listed separately.</a:t>
             </a:r>
           </a:p>
         </p:txBody>
@@ -4023,7 +4023,7 @@
                   <a:srgbClr val="E8872D"/>
                 </a:solidFill>
               </a:rPr>
-              <a:t>四分位</a:t>
+              <a:t>quartile</a:t>
             </a:r>
           </a:p>
         </p:txBody>
@@ -4075,7 +4075,7 @@
                   <a:srgbClr val="172033"/>
                 </a:solidFill>
               </a:rPr>
-              <a:t>PERCENTILE.INC（线性插值，等同 Type 7）</a:t>
+              <a:t>PERCENTILE.INC(linear interpolation, equivalent to Type 7)</a:t>
             </a:r>
           </a:p>
         </p:txBody>
@@ -4127,7 +4127,7 @@
                   <a:srgbClr val="E8872D"/>
                 </a:solidFill>
               </a:rPr>
-              <a:t>须线与异常</a:t>
+              <a:t>Whiskers and exceptions</a:t>
             </a:r>
           </a:p>
         </p:txBody>
@@ -4179,7 +4179,7 @@
                   <a:srgbClr val="172033"/>
                 </a:solidFill>
               </a:rPr>
-              <a:t>端点为 1.5×IQR 围栏内的最远观测；围栏外记录逐点标为异常值</a:t>
+              <a:t>The endpoint is 1.5×IQR The farthest observation inside the fence; records outside the fence are marked point by point as outliers</a:t>
             </a:r>
           </a:p>
         </p:txBody>
@@ -4231,7 +4231,7 @@
                   <a:srgbClr val="15375F"/>
                 </a:solidFill>
               </a:rPr>
-              <a:t>关键发现</a:t>
+              <a:t>Key findings</a:t>
             </a:r>
           </a:p>
         </p:txBody>
@@ -4283,7 +4283,7 @@
                   <a:srgbClr val="E8872D"/>
                 </a:solidFill>
               </a:rPr>
-              <a:t>华东中位数为7.0天，且中间50%仅跨2.1天，五个区域中最集中</a:t>
+              <a:t>The median in East China is7.0Heaven, and the middle50%only across2.1days, the most concentrated among the five regions</a:t>
             </a:r>
           </a:p>
         </p:txBody>
@@ -4335,7 +4335,7 @@
                   <a:srgbClr val="172033"/>
                 </a:solidFill>
               </a:rPr>
-              <a:t>西南中位数为10.2天，并出现21.4天和23.0天两笔异常长周期记录</a:t>
+              <a:t>The Southwest median is10.2days and appear21.4Tianhe23.0Two unusually long period records per day</a:t>
             </a:r>
           </a:p>
         </p:txBody>
@@ -4391,7 +4391,7 @@
                   <a:srgbClr val="15375F"/>
                 </a:solidFill>
               </a:rPr>
-              <a:t>结论：优先复盘西南长周期订单，同时保留区域口径与缺失记录供后续复算</a:t>
+              <a:t>Conclusion: Give priority to reviewing long-term orders in the southwest, while retaining regional caliber and missing records for subsequent recalculation.</a:t>
             </a:r>
           </a:p>
         </p:txBody>
